--- a/module-ase-principles/slides/lecture-01-intent-specifications-realizations-and-judgments.pptx
+++ b/module-ase-principles/slides/lecture-01-intent-specifications-realizations-and-judgments.pptx
@@ -2276,7 +2276,7 @@
           <a:lstStyle/>
           <a:p>
             <a:r>
-              <a:t>A test that cites nothing is not allowed in A0.</a:t>
+              <a:t>A test may cite nothing; a test clause with no citing test fails the run.</a:t>
             </a:r>
           </a:p>
         </p:txBody>
@@ -3186,7 +3186,7 @@
           <a:lstStyle/>
           <a:p>
             <a:r>
-              <a:t>Five rows. Each is a claim with status, evidence, provenance, and a stale-when.</a:t>
+              <a:t>The summary table; below it, one section per judgment with a row per clause: holds, evidence, provenance. Compiled by an agent on request; the last section lists what was run and read.</a:t>
             </a:r>
           </a:p>
         </p:txBody>
@@ -3326,7 +3326,7 @@
           <a:lstStyle/>
           <a:p>
             <a:r>
-              <a:t>WF-1: tools/gate.sh must exit 0 before a commit.</a:t>
+              <a:t>tools/evaluate.sh runs every mechanical evaluation and exits at the first failure; nothing runs it unasked. The gate, the same command behind a hook, is A2's.</a:t>
             </a:r>
           </a:p>
         </p:txBody>
@@ -3536,7 +3536,7 @@
           <a:lstStyle/>
           <a:p>
             <a:r>
-              <a:t>One rule per judgment plus workflow and reports, CONF having two.</a:t>
+              <a:t>Each judgment stated once, then as clauses per form. No rule says when a claim must hold.</a:t>
             </a:r>
           </a:p>
         </p:txBody>
@@ -3606,7 +3606,7 @@
           <a:lstStyle/>
           <a:p>
             <a:r>
-              <a:t>Decided-by makes a rule checkable; on-failure gives a red result a next step.</a:t>
+              <a:t>The first three fields depend only on the form; the fourth binds the clause to this project. Evaluated-by makes a clause checkable.</a:t>
             </a:r>
           </a:p>
         </p:txBody>
@@ -3676,7 +3676,7 @@
           <a:lstStyle/>
           <a:p>
             <a:r>
-              <a:t>The agent reads the file; person and agent follow the same written process.</a:t>
+              <a:t>The agent reads the file; person and agent work to the same written definitions. CLAUDE.md gives it three roles.</a:t>
             </a:r>
           </a:p>
         </p:txBody>
@@ -3746,7 +3746,7 @@
           <a:lstStyle/>
           <a:p>
             <a:r>
-              <a:t>Under thirty lines of code against more than three hundred of specifications, rules, reports. Optional demo: ask an agent what the system does and how it knows.</a:t>
+              <a:t>Under thirty lines of code against several hundred of specifications, judgments, records, reports. Optional demo: ask an agent what the system does and how it knows.</a:t>
             </a:r>
           </a:p>
         </p:txBody>
@@ -4166,7 +4166,7 @@
           <a:lstStyle/>
           <a:p>
             <a:r>
-              <a:t>Forces an amendment, a stale VAL row, and a re-sign before the test and the gate.</a:t>
+              <a:t>Forces an amendment, a VAL row that stops holding, and a re-sign before the test and the report.</a:t>
             </a:r>
           </a:p>
         </p:txBody>
@@ -4446,7 +4446,7 @@
           <a:lstStyle/>
           <a:p>
             <a:r>
-              <a:t>Diagram 1. Intent has no artifact. VAL compares intent and specifications; CONF compares specifications and realization; SQ and RQ are loops on one artifact; TR is the dashed links. The ledger records the five; the gate decides the mechanical parts before a commit.</a:t>
+              <a:t>Diagram 1. Intent has no artifact. VAL compares intent and specifications; CONF compares specifications and realization; SQ and RQ are loops on one artifact; TR is the dashed links. The assurance report states the five, compiled on request; nothing gates a commit in A0.</a:t>
             </a:r>
           </a:p>
         </p:txBody>
@@ -8060,7 +8060,7 @@
             </a:pPr>
             <a:r>
               <a:rPr sz="3000" b="0" i="0"/>
-              <a:t>Three entities, five judgments, one ledger</a:t>
+              <a:t>Three entities, five judgments, one report</a:t>
             </a:r>
           </a:p>
         </p:txBody>
@@ -8810,8 +8810,8 @@
               </a:tblPr>
               <a:tblGrid>
                 <a:gridCol w="1371600"/>
-                <a:gridCol w="1463040"/>
-                <a:gridCol w="1828799"/>
+                <a:gridCol w="1645920"/>
+                <a:gridCol w="1645919"/>
               </a:tblGrid>
               <a:tr h="384048">
                 <a:tc>
@@ -8856,7 +8856,7 @@
                             <a:srgbClr val="FFFFFF"/>
                           </a:solidFill>
                         </a:rPr>
-                        <a:t>Status</a:t>
+                        <a:t>Holds?</a:t>
                       </a:r>
                     </a:p>
                   </a:txBody>
@@ -8882,7 +8882,7 @@
                             <a:srgbClr val="FFFFFF"/>
                           </a:solidFill>
                         </a:rPr>
-                        <a:t>Evidence</a:t>
+                        <a:t>Rests on</a:t>
                       </a:r>
                     </a:p>
                   </a:txBody>
@@ -8936,7 +8936,7 @@
                             <a:srgbClr val="2E7D32"/>
                           </a:solidFill>
                         </a:rPr>
-                        <a:t>established</a:t>
+                        <a:t>holds</a:t>
                       </a:r>
                     </a:p>
                   </a:txBody>
@@ -8962,7 +8962,7 @@
                             <a:srgbClr val="000000"/>
                           </a:solidFill>
                         </a:rPr>
-                        <a:t>read together</a:t>
+                        <a:t>a review record</a:t>
                       </a:r>
                     </a:p>
                   </a:txBody>
@@ -9016,7 +9016,7 @@
                             <a:srgbClr val="2E7D32"/>
                           </a:solidFill>
                         </a:rPr>
-                        <a:t>established</a:t>
+                        <a:t>holds</a:t>
                       </a:r>
                     </a:p>
                   </a:txBody>
@@ -9096,7 +9096,7 @@
                             <a:srgbClr val="2E7D32"/>
                           </a:solidFill>
                         </a:rPr>
-                        <a:t>established</a:t>
+                        <a:t>holds</a:t>
                       </a:r>
                     </a:p>
                   </a:txBody>
@@ -9176,7 +9176,7 @@
                             <a:srgbClr val="2E7D32"/>
                           </a:solidFill>
                         </a:rPr>
-                        <a:t>established</a:t>
+                        <a:t>holds</a:t>
                       </a:r>
                     </a:p>
                   </a:txBody>
@@ -9202,7 +9202,7 @@
                             <a:srgbClr val="000000"/>
                           </a:solidFill>
                         </a:rPr>
-                        <a:t>sign-off</a:t>
+                        <a:t>the sign-off</a:t>
                       </a:r>
                     </a:p>
                   </a:txBody>
@@ -9256,7 +9256,7 @@
                             <a:srgbClr val="2E7D32"/>
                           </a:solidFill>
                         </a:rPr>
-                        <a:t>established</a:t>
+                        <a:t>holds</a:t>
                       </a:r>
                     </a:p>
                   </a:txBody>
@@ -9330,7 +9330,7 @@
                   <a:srgbClr val="595959"/>
                 </a:solidFill>
               </a:rPr>
-              <a:t>The ledger: which judgments hold at a named commit, on what evidence.</a:t>
+              <a:t>The assurance report: which judgments hold for a named state, on what evidence.</a:t>
             </a:r>
           </a:p>
         </p:txBody>
@@ -9387,7 +9387,7 @@
                   <a:srgbClr val="000000"/>
                 </a:solidFill>
               </a:rPr>
-              <a:t>work</a:t>
+              <a:t>ask</a:t>
             </a:r>
           </a:p>
         </p:txBody>
@@ -9480,7 +9480,7 @@
                   <a:srgbClr val="000000"/>
                 </a:solidFill>
               </a:rPr>
-              <a:t>gate</a:t>
+              <a:t>evaluate; read</a:t>
             </a:r>
           </a:p>
           <a:p>
@@ -9495,7 +9495,7 @@
                   <a:srgbClr val="595959"/>
                 </a:solidFill>
               </a:rPr>
-              <a:t>an exit code</a:t>
+              <a:t>runs now; records</a:t>
             </a:r>
           </a:p>
         </p:txBody>
@@ -9588,7 +9588,7 @@
                   <a:srgbClr val="000000"/>
                 </a:solidFill>
               </a:rPr>
-              <a:t>commit</a:t>
+              <a:t>report</a:t>
             </a:r>
           </a:p>
         </p:txBody>
@@ -9626,7 +9626,7 @@
                   <a:srgbClr val="595959"/>
                 </a:solidFill>
               </a:rPr>
-              <a:t>The gate: the mechanical parts, before every commit.</a:t>
+              <a:t>Compiled on request. Nothing in A0 says when a claim must hold.</a:t>
             </a:r>
           </a:p>
         </p:txBody>
@@ -12812,7 +12812,7 @@
                   <a:srgbClr val="000000"/>
                 </a:solidFill>
               </a:rPr>
-              <a:t>In A0: a person read the seven clauses together (rule SQ-1)</a:t>
+              <a:t>In A0: a person read the seven clauses together (ConOps-SQ-1, Reqs-SQ-1, Specs-SQ-1)</a:t>
             </a:r>
           </a:p>
         </p:txBody>
@@ -16993,7 +16993,7 @@
                   <a:srgbClr val="000000"/>
                 </a:solidFill>
               </a:rPr>
-              <a:t>Every link resolves, both ways: story → requirement → test → report row → ledger row</a:t>
+              <a:t>Every link resolves, both ways: story → requirement → test → conformance-report row → assurance-report row</a:t>
             </a:r>
           </a:p>
         </p:txBody>
@@ -19637,7 +19637,7 @@
         </p:nvGraphicFramePr>
         <p:xfrm>
           <a:off x="777240" y="1325880"/>
-          <a:ext cx="11018520" cy="4242816"/>
+          <a:ext cx="11018520" cy="4279392"/>
         </p:xfrm>
         <a:graphic>
           <a:graphicData uri="http://schemas.openxmlformats.org/drawingml/2006/table">
@@ -19650,7 +19650,7 @@
                 <a:gridCol w="4572000"/>
                 <a:gridCol w="4343400"/>
               </a:tblGrid>
-              <a:tr h="530352">
+              <a:tr h="475488">
                 <a:tc>
                   <a:txBody>
                     <a:bodyPr wrap="square"/>
@@ -19730,7 +19730,7 @@
                   </a:tcPr>
                 </a:tc>
               </a:tr>
-              <a:tr h="530352">
+              <a:tr h="475488">
                 <a:tc>
                   <a:txBody>
                     <a:bodyPr wrap="square"/>
@@ -19810,7 +19810,7 @@
                   </a:tcPr>
                 </a:tc>
               </a:tr>
-              <a:tr h="530352">
+              <a:tr h="475488">
                 <a:tc>
                   <a:txBody>
                     <a:bodyPr wrap="square"/>
@@ -19890,7 +19890,7 @@
                   </a:tcPr>
                 </a:tc>
               </a:tr>
-              <a:tr h="530352">
+              <a:tr h="475488">
                 <a:tc>
                   <a:txBody>
                     <a:bodyPr wrap="square"/>
@@ -19970,7 +19970,7 @@
                   </a:tcPr>
                 </a:tc>
               </a:tr>
-              <a:tr h="530352">
+              <a:tr h="475488">
                 <a:tc>
                   <a:txBody>
                     <a:bodyPr wrap="square"/>
@@ -19987,7 +19987,7 @@
                             <a:srgbClr val="000000"/>
                           </a:solidFill>
                         </a:rPr>
-                        <a:t>Development rules</a:t>
+                        <a:t>Judgments</a:t>
                       </a:r>
                     </a:p>
                   </a:txBody>
@@ -20013,7 +20013,7 @@
                             <a:srgbClr val="000000"/>
                           </a:solidFill>
                         </a:rPr>
-                        <a:t>process/rules.md</a:t>
+                        <a:t>process/judgments.md · templates/assurance-report.md</a:t>
                       </a:r>
                     </a:p>
                   </a:txBody>
@@ -20039,7 +20039,7 @@
                             <a:srgbClr val="000000"/>
                           </a:solidFill>
                         </a:rPr>
-                        <a:t>how each judgment is established</a:t>
+                        <a:t>what each claim says, per form; how it is evaluated</a:t>
                       </a:r>
                     </a:p>
                   </a:txBody>
@@ -20050,7 +20050,7 @@
                   </a:tcPr>
                 </a:tc>
               </a:tr>
-              <a:tr h="530352">
+              <a:tr h="475488">
                 <a:tc>
                   <a:txBody>
                     <a:bodyPr wrap="square"/>
@@ -20067,7 +20067,7 @@
                             <a:srgbClr val="000000"/>
                           </a:solidFill>
                         </a:rPr>
-                        <a:t>Reports</a:t>
+                        <a:t>Records</a:t>
                       </a:r>
                     </a:p>
                   </a:txBody>
@@ -20093,7 +20093,7 @@
                             <a:srgbClr val="000000"/>
                           </a:solidFill>
                         </a:rPr>
-                        <a:t>reports/ledger.md · dev-log.md · walkthrough.md · conformance.md</a:t>
+                        <a:t>records/reviews.md · walkthrough.md · dev-log.md</a:t>
                       </a:r>
                     </a:p>
                   </a:txBody>
@@ -20119,7 +20119,7 @@
                             <a:srgbClr val="000000"/>
                           </a:solidFill>
                         </a:rPr>
-                        <a:t>the development state, without reading the code</a:t>
+                        <a:t>what people decided and did</a:t>
                       </a:r>
                     </a:p>
                   </a:txBody>
@@ -20130,7 +20130,7 @@
                   </a:tcPr>
                 </a:tc>
               </a:tr>
-              <a:tr h="530352">
+              <a:tr h="475488">
                 <a:tc>
                   <a:txBody>
                     <a:bodyPr wrap="square"/>
@@ -20147,7 +20147,7 @@
                             <a:srgbClr val="000000"/>
                           </a:solidFill>
                         </a:rPr>
-                        <a:t>Technology</a:t>
+                        <a:t>Reports</a:t>
                       </a:r>
                     </a:p>
                   </a:txBody>
@@ -20173,7 +20173,7 @@
                             <a:srgbClr val="000000"/>
                           </a:solidFill>
                         </a:rPr>
-                        <a:t>pyproject.toml · uv.lock</a:t>
+                        <a:t>reports/assurance-report.md · conformance.md</a:t>
                       </a:r>
                     </a:p>
                   </a:txBody>
@@ -20199,7 +20199,7 @@
                             <a:srgbClr val="000000"/>
                           </a:solidFill>
                         </a:rPr>
-                        <a:t>Python 3.12+; pytest, pytest-cov, ruff; uv</a:t>
+                        <a:t>the development state, without reading the code</a:t>
                       </a:r>
                     </a:p>
                   </a:txBody>
@@ -20210,7 +20210,7 @@
                   </a:tcPr>
                 </a:tc>
               </a:tr>
-              <a:tr h="530352">
+              <a:tr h="475488">
                 <a:tc>
                   <a:txBody>
                     <a:bodyPr wrap="square"/>
@@ -20227,7 +20227,7 @@
                             <a:srgbClr val="000000"/>
                           </a:solidFill>
                         </a:rPr>
-                        <a:t>Support</a:t>
+                        <a:t>Technology</a:t>
                       </a:r>
                     </a:p>
                   </a:txBody>
@@ -20253,7 +20253,7 @@
                             <a:srgbClr val="000000"/>
                           </a:solidFill>
                         </a:rPr>
-                        <a:t>tools/gate.sh · tools/walk.py · CLAUDE.md</a:t>
+                        <a:t>pyproject.toml · uv.lock</a:t>
                       </a:r>
                     </a:p>
                   </a:txBody>
@@ -20279,13 +20279,93 @@
                             <a:srgbClr val="000000"/>
                           </a:solidFill>
                         </a:rPr>
-                        <a:t>the gate; the walkthrough helper; what an agent reads first</a:t>
+                        <a:t>Python 3.12+; pytest, pytest-cov, ruff; uv</a:t>
                       </a:r>
                     </a:p>
                   </a:txBody>
                   <a:tcPr marL="73152" marR="73152" marT="36576" marB="36576">
                     <a:solidFill>
                       <a:srgbClr val="FFFFFF"/>
+                    </a:solidFill>
+                  </a:tcPr>
+                </a:tc>
+              </a:tr>
+              <a:tr h="475488">
+                <a:tc>
+                  <a:txBody>
+                    <a:bodyPr wrap="square"/>
+                    <a:lstStyle/>
+                    <a:p>
+                      <a:pPr>
+                        <a:spcAft>
+                          <a:spcPts val="0"/>
+                        </a:spcAft>
+                      </a:pPr>
+                      <a:r>
+                        <a:rPr sz="1600" b="0" i="0">
+                          <a:solidFill>
+                            <a:srgbClr val="000000"/>
+                          </a:solidFill>
+                        </a:rPr>
+                        <a:t>Support</a:t>
+                      </a:r>
+                    </a:p>
+                  </a:txBody>
+                  <a:tcPr marL="73152" marR="73152" marT="36576" marB="36576">
+                    <a:solidFill>
+                      <a:srgbClr val="F3F0F9"/>
+                    </a:solidFill>
+                  </a:tcPr>
+                </a:tc>
+                <a:tc>
+                  <a:txBody>
+                    <a:bodyPr wrap="square"/>
+                    <a:lstStyle/>
+                    <a:p>
+                      <a:pPr>
+                        <a:spcAft>
+                          <a:spcPts val="0"/>
+                        </a:spcAft>
+                      </a:pPr>
+                      <a:r>
+                        <a:rPr sz="1600" b="0" i="0">
+                          <a:solidFill>
+                            <a:srgbClr val="000000"/>
+                          </a:solidFill>
+                        </a:rPr>
+                        <a:t>tools/evaluate.sh · tools/walk.py · CLAUDE.md</a:t>
+                      </a:r>
+                    </a:p>
+                  </a:txBody>
+                  <a:tcPr marL="73152" marR="73152" marT="36576" marB="36576">
+                    <a:solidFill>
+                      <a:srgbClr val="F3F0F9"/>
+                    </a:solidFill>
+                  </a:tcPr>
+                </a:tc>
+                <a:tc>
+                  <a:txBody>
+                    <a:bodyPr wrap="square"/>
+                    <a:lstStyle/>
+                    <a:p>
+                      <a:pPr>
+                        <a:spcAft>
+                          <a:spcPts val="0"/>
+                        </a:spcAft>
+                      </a:pPr>
+                      <a:r>
+                        <a:rPr sz="1600" b="0" i="0">
+                          <a:solidFill>
+                            <a:srgbClr val="000000"/>
+                          </a:solidFill>
+                        </a:rPr>
+                        <a:t>every mechanical evaluation; the walkthrough helper; what an agent reads first</a:t>
+                      </a:r>
+                    </a:p>
+                  </a:txBody>
+                  <a:tcPr marL="73152" marR="73152" marT="36576" marB="36576">
+                    <a:solidFill>
+                      <a:srgbClr val="F3F0F9"/>
                     </a:solidFill>
                   </a:tcPr>
                 </a:tc>
@@ -20635,7 +20715,7 @@
             </a:pPr>
             <a:r>
               <a:rPr sz="1800" b="0" i="0"/>
-              <a:t>No file called intent anywhere in v0</a:t>
+              <a:t>No file called intent anywhere in a0</a:t>
             </a:r>
           </a:p>
         </p:txBody>
@@ -22332,7 +22412,7 @@
                             <a:srgbClr val="FFFFFF"/>
                           </a:solidFill>
                         </a:rPr>
-                        <a:t>In a gate?</a:t>
+                        <a:t>Behind a gate (A2)?</a:t>
                       </a:r>
                     </a:p>
                   </a:txBody>
@@ -23363,7 +23443,7 @@
                   <a:srgbClr val="000000"/>
                 </a:solidFill>
               </a:rPr>
-              <a:t>Established in A0 by rule SQ-1: a person read the seven clauses together and recorded who, when, and which clauses in the ledger.</a:t>
+              <a:t>Evaluated in A0 under ConOps-SQ-1, Reqs-SQ-1, and Specs-SQ-1: a person read the seven clauses together and recorded who, when, and which clauses in records/reviews.md.</a:t>
             </a:r>
           </a:p>
         </p:txBody>
@@ -24176,7 +24256,7 @@
             </a:r>
             <a:r>
               <a:rPr sz="1800" b="0" i="0"/>
-              <a:t>the ledger (which judgments hold, on what evidence), the development log (what each task did), and the reports.</a:t>
+              <a:t>the assurance report (which judgments hold, on what evidence), the records (what people decided and did), and the development log (what each task did).</a:t>
             </a:r>
           </a:p>
         </p:txBody>
@@ -24893,7 +24973,7 @@
         <p:spPr>
           <a:xfrm>
             <a:off x="777240" y="3749039"/>
-            <a:ext cx="11018520" cy="640080"/>
+            <a:ext cx="11018520" cy="731520"/>
           </a:xfrm>
           <a:prstGeom prst="rect">
             <a:avLst/>
@@ -24937,12 +25017,12 @@
               </a:spcAft>
             </a:pPr>
             <a:r>
-              <a:rPr sz="1800" b="0" i="0">
+              <a:rPr sz="1600" b="0" i="0">
                 <a:solidFill>
                   <a:srgbClr val="000000"/>
                 </a:solidFill>
               </a:rPr>
-              <a:t>A test that cites no clause is not allowed in the suite (rules CONF-1 and TR-1).</a:t>
+              <a:t>A test may omit a citation. A test clause with no citing test is a gap (Reqs-CONF-1); a citation that names no clause fails the run (Specs-TR-1).</a:t>
             </a:r>
           </a:p>
         </p:txBody>
@@ -25159,7 +25239,7 @@
         </p:nvGraphicFramePr>
         <p:xfrm>
           <a:off x="6492240" y="1325880"/>
-          <a:ext cx="5303520" cy="3200400"/>
+          <a:ext cx="5303519" cy="2743200"/>
         </p:xfrm>
         <a:graphic>
           <a:graphicData uri="http://schemas.openxmlformats.org/drawingml/2006/table">
@@ -25168,10 +25248,10 @@
                 <a:tableStyleId>{5C22544A-7EE6-4342-B048-85BDC9FD1C3A}</a:tableStyleId>
               </a:tblPr>
               <a:tblGrid>
-                <a:gridCol w="1463040"/>
-                <a:gridCol w="3840480"/>
+                <a:gridCol w="1554480"/>
+                <a:gridCol w="3749039"/>
               </a:tblGrid>
-              <a:tr h="457200">
+              <a:tr h="548640">
                 <a:tc>
                   <a:txBody>
                     <a:bodyPr wrap="square"/>
@@ -25188,7 +25268,7 @@
                             <a:srgbClr val="FFFFFF"/>
                           </a:solidFill>
                         </a:rPr>
-                        <a:t>RQ-1</a:t>
+                        <a:t>Code-RQ-1</a:t>
                       </a:r>
                     </a:p>
                   </a:txBody>
@@ -25225,7 +25305,7 @@
                   </a:tcPr>
                 </a:tc>
               </a:tr>
-              <a:tr h="457200">
+              <a:tr h="548640">
                 <a:tc>
                   <a:txBody>
                     <a:bodyPr wrap="square"/>
@@ -25242,7 +25322,7 @@
                             <a:srgbClr val="000000"/>
                           </a:solidFill>
                         </a:rPr>
-                        <a:t>Style</a:t>
+                        <a:t>Holds when</a:t>
                       </a:r>
                     </a:p>
                   </a:txBody>
@@ -25268,7 +25348,7 @@
                             <a:srgbClr val="000000"/>
                           </a:solidFill>
                         </a:rPr>
-                        <a:t>obligation</a:t>
+                        <a:t>The realization passes the project's linter, and its test suite collects without error.</a:t>
                       </a:r>
                     </a:p>
                   </a:txBody>
@@ -25279,7 +25359,7 @@
                   </a:tcPr>
                 </a:tc>
               </a:tr>
-              <a:tr h="457200">
+              <a:tr h="548640">
                 <a:tc>
                   <a:txBody>
                     <a:bodyPr wrap="square"/>
@@ -25296,115 +25376,7 @@
                             <a:srgbClr val="000000"/>
                           </a:solidFill>
                         </a:rPr>
-                        <a:t>Maintains</a:t>
-                      </a:r>
-                    </a:p>
-                  </a:txBody>
-                  <a:tcPr marL="73152" marR="73152" marT="36576" marB="36576">
-                    <a:solidFill>
-                      <a:srgbClr val="F3F0F9"/>
-                    </a:solidFill>
-                  </a:tcPr>
-                </a:tc>
-                <a:tc>
-                  <a:txBody>
-                    <a:bodyPr wrap="square"/>
-                    <a:lstStyle/>
-                    <a:p>
-                      <a:pPr>
-                        <a:spcAft>
-                          <a:spcPts val="0"/>
-                        </a:spcAft>
-                      </a:pPr>
-                      <a:r>
-                        <a:rPr sz="1600" b="0" i="0">
-                          <a:solidFill>
-                            <a:srgbClr val="000000"/>
-                          </a:solidFill>
-                        </a:rPr>
-                        <a:t>RQ</a:t>
-                      </a:r>
-                    </a:p>
-                  </a:txBody>
-                  <a:tcPr marL="73152" marR="73152" marT="36576" marB="36576">
-                    <a:solidFill>
-                      <a:srgbClr val="F3F0F9"/>
-                    </a:solidFill>
-                  </a:tcPr>
-                </a:tc>
-              </a:tr>
-              <a:tr h="457200">
-                <a:tc>
-                  <a:txBody>
-                    <a:bodyPr wrap="square"/>
-                    <a:lstStyle/>
-                    <a:p>
-                      <a:pPr>
-                        <a:spcAft>
-                          <a:spcPts val="0"/>
-                        </a:spcAft>
-                      </a:pPr>
-                      <a:r>
-                        <a:rPr sz="1600" b="0" i="0">
-                          <a:solidFill>
-                            <a:srgbClr val="000000"/>
-                          </a:solidFill>
-                        </a:rPr>
-                        <a:t>Statement</a:t>
-                      </a:r>
-                    </a:p>
-                  </a:txBody>
-                  <a:tcPr marL="73152" marR="73152" marT="36576" marB="36576">
-                    <a:solidFill>
-                      <a:srgbClr val="FFFFFF"/>
-                    </a:solidFill>
-                  </a:tcPr>
-                </a:tc>
-                <a:tc>
-                  <a:txBody>
-                    <a:bodyPr wrap="square"/>
-                    <a:lstStyle/>
-                    <a:p>
-                      <a:pPr>
-                        <a:spcAft>
-                          <a:spcPts val="0"/>
-                        </a:spcAft>
-                      </a:pPr>
-                      <a:r>
-                        <a:rPr sz="1600" b="0" i="0">
-                          <a:solidFill>
-                            <a:srgbClr val="000000"/>
-                          </a:solidFill>
-                        </a:rPr>
-                        <a:t>The realization MUST pass ruff check, and the suite MUST collect without error.</a:t>
-                      </a:r>
-                    </a:p>
-                  </a:txBody>
-                  <a:tcPr marL="73152" marR="73152" marT="36576" marB="36576">
-                    <a:solidFill>
-                      <a:srgbClr val="FFFFFF"/>
-                    </a:solidFill>
-                  </a:tcPr>
-                </a:tc>
-              </a:tr>
-              <a:tr h="457200">
-                <a:tc>
-                  <a:txBody>
-                    <a:bodyPr wrap="square"/>
-                    <a:lstStyle/>
-                    <a:p>
-                      <a:pPr>
-                        <a:spcAft>
-                          <a:spcPts val="0"/>
-                        </a:spcAft>
-                      </a:pPr>
-                      <a:r>
-                        <a:rPr sz="1600" b="0" i="0">
-                          <a:solidFill>
-                            <a:srgbClr val="000000"/>
-                          </a:solidFill>
-                        </a:rPr>
-                        <a:t>Decided by</a:t>
+                        <a:t>Evaluated by</a:t>
                       </a:r>
                     </a:p>
                   </a:txBody>
@@ -25441,7 +25413,7 @@
                   </a:tcPr>
                 </a:tc>
               </a:tr>
-              <a:tr h="457200">
+              <a:tr h="548640">
                 <a:tc>
                   <a:txBody>
                     <a:bodyPr wrap="square"/>
@@ -25484,7 +25456,7 @@
                             <a:srgbClr val="000000"/>
                           </a:solidFill>
                         </a:rPr>
-                        <a:t>exit codes, in the dev log</a:t>
+                        <a:t>the exit codes, quoted in the report</a:t>
                       </a:r>
                     </a:p>
                   </a:txBody>
@@ -25495,7 +25467,7 @@
                   </a:tcPr>
                 </a:tc>
               </a:tr>
-              <a:tr h="457200">
+              <a:tr h="548640">
                 <a:tc>
                   <a:txBody>
                     <a:bodyPr wrap="square"/>
@@ -25512,7 +25484,7 @@
                             <a:srgbClr val="000000"/>
                           </a:solidFill>
                         </a:rPr>
-                        <a:t>On failure</a:t>
+                        <a:t>In this project</a:t>
                       </a:r>
                     </a:p>
                   </a:txBody>
@@ -25538,7 +25510,7 @@
                             <a:srgbClr val="000000"/>
                           </a:solidFill>
                         </a:rPr>
-                        <a:t>fixed before the commit</a:t>
+                        <a:t>guard/, tests/, tools/; uv run ruff check .; uv run pytest --collect-only</a:t>
                       </a:r>
                     </a:p>
                   </a:txBody>
@@ -26825,7 +26797,7 @@
                             <a:srgbClr val="000000"/>
                           </a:solidFill>
                         </a:rPr>
-                        <a:t>see walkthrough.md</a:t>
+                        <a:t>see records/walkthrough.md</a:t>
                       </a:r>
                     </a:p>
                   </a:txBody>
@@ -28289,7 +28261,7 @@
                   <a:srgbClr val="595959"/>
                 </a:solidFill>
               </a:rPr>
-              <a:t>reports/walkthrough.md — walked by the instructor, in each role, on 2026-10-20, against v0</a:t>
+              <a:t>records/walkthrough.md — walked by the instructor, in each role, on 2026-10-20, against the A0 snapshot</a:t>
             </a:r>
           </a:p>
         </p:txBody>
@@ -28943,7 +28915,7 @@
                             <a:srgbClr val="000000"/>
                           </a:solidFill>
                         </a:rPr>
-                        <a:t>Can stand in a gate</a:t>
+                        <a:t>Can be put behind a gate (A2)</a:t>
                       </a:r>
                     </a:p>
                   </a:txBody>
@@ -29200,7 +29172,7 @@
                   <a:srgbClr val="000000"/>
                 </a:solidFill>
               </a:rPr>
-              <a:t>A verifier can be wrong: a test can assert the wrong thing. The ledger records which verifier made each claim, so a wrong one can be traced. More later.</a:t>
+              <a:t>A verifier can be wrong: a test can assert the wrong thing. The report records which verifier made each claim, so a wrong one can be traced. More later.</a:t>
             </a:r>
           </a:p>
         </p:txBody>
@@ -29454,7 +29426,7 @@
                 </a:solidFill>
                 <a:latin typeface="Courier New"/>
               </a:rPr>
-              <a:t>reports/walkthrough.md, section Sign-off (rule VAL-1: one from each user category)</a:t>
+              <a:t>records/walkthrough.md, section Sign-off (ConOps-VAL-1: one from each user category)</a:t>
             </a:r>
           </a:p>
         </p:txBody>
@@ -29564,7 +29536,7 @@
                   <a:srgbClr val="000000"/>
                 </a:solidFill>
               </a:rPr>
-              <a:t>The VAL row can go stale when no file has changed: a stakeholder changes their mind and says so (A3).</a:t>
+              <a:t>The VAL row can stop holding when no file has changed: a stakeholder changes their mind and says so (A3).</a:t>
             </a:r>
           </a:p>
         </p:txBody>
@@ -30162,7 +30134,7 @@
             </a:pPr>
             <a:r>
               <a:rPr sz="3000" b="0" i="0"/>
-              <a:t>Breaking it: a wrong system with a green ledger</a:t>
+              <a:t>Breaking it: a wrong system with a green report</a:t>
             </a:r>
           </a:p>
         </p:txBody>
@@ -30316,7 +30288,7 @@
         </p:nvGraphicFramePr>
         <p:xfrm>
           <a:off x="777240" y="2377440"/>
-          <a:ext cx="6035039" cy="2468880"/>
+          <a:ext cx="6035040" cy="2468880"/>
         </p:xfrm>
         <a:graphic>
           <a:graphicData uri="http://schemas.openxmlformats.org/drawingml/2006/table">
@@ -30326,8 +30298,8 @@
               </a:tblPr>
               <a:tblGrid>
                 <a:gridCol w="1371600"/>
-                <a:gridCol w="1463040"/>
-                <a:gridCol w="3200399"/>
+                <a:gridCol w="1645920"/>
+                <a:gridCol w="3017520"/>
               </a:tblGrid>
               <a:tr h="411480">
                 <a:tc>
@@ -30372,7 +30344,7 @@
                             <a:srgbClr val="FFFFFF"/>
                           </a:solidFill>
                         </a:rPr>
-                        <a:t>Status</a:t>
+                        <a:t>Holds?</a:t>
                       </a:r>
                     </a:p>
                   </a:txBody>
@@ -30398,7 +30370,7 @@
                             <a:srgbClr val="FFFFFF"/>
                           </a:solidFill>
                         </a:rPr>
-                        <a:t>Evidence</a:t>
+                        <a:t>Rests on</a:t>
                       </a:r>
                     </a:p>
                   </a:txBody>
@@ -30452,7 +30424,7 @@
                             <a:srgbClr val="2E7D32"/>
                           </a:solidFill>
                         </a:rPr>
-                        <a:t>established</a:t>
+                        <a:t>holds</a:t>
                       </a:r>
                     </a:p>
                   </a:txBody>
@@ -30478,7 +30450,7 @@
                             <a:srgbClr val="000000"/>
                           </a:solidFill>
                         </a:rPr>
-                        <a:t>read together</a:t>
+                        <a:t>a review record</a:t>
                       </a:r>
                     </a:p>
                   </a:txBody>
@@ -30532,7 +30504,7 @@
                             <a:srgbClr val="2E7D32"/>
                           </a:solidFill>
                         </a:rPr>
-                        <a:t>established</a:t>
+                        <a:t>holds</a:t>
                       </a:r>
                     </a:p>
                   </a:txBody>
@@ -30612,7 +30584,7 @@
                             <a:srgbClr val="2E7D32"/>
                           </a:solidFill>
                         </a:rPr>
-                        <a:t>established</a:t>
+                        <a:t>holds</a:t>
                       </a:r>
                     </a:p>
                   </a:txBody>
@@ -30718,7 +30690,7 @@
                             <a:srgbClr val="000000"/>
                           </a:solidFill>
                         </a:rPr>
-                        <a:t>sign-off</a:t>
+                        <a:t>the sign-off</a:t>
                       </a:r>
                     </a:p>
                   </a:txBody>
@@ -30772,7 +30744,7 @@
                             <a:srgbClr val="2E7D32"/>
                           </a:solidFill>
                         </a:rPr>
-                        <a:t>established</a:t>
+                        <a:t>holds</a:t>
                       </a:r>
                     </a:p>
                   </a:txBody>
@@ -31449,7 +31421,7 @@
                   <a:srgbClr val="595959"/>
                 </a:solidFill>
               </a:rPr>
-              <a:t>report</a:t>
+              <a:t>conformance report</a:t>
             </a:r>
           </a:p>
         </p:txBody>
@@ -31557,7 +31529,7 @@
                   <a:srgbClr val="595959"/>
                 </a:solidFill>
               </a:rPr>
-              <a:t>ledger</a:t>
+              <a:t>assurance report</a:t>
             </a:r>
           </a:p>
         </p:txBody>
@@ -31712,7 +31684,7 @@
             </a:pPr>
             <a:r>
               <a:rPr sz="3000" b="0" i="0"/>
-              <a:t>The ledger at v0</a:t>
+              <a:t>The assurance report at a0</a:t>
             </a:r>
           </a:p>
         </p:txBody>
@@ -31813,8 +31785,8 @@
               </a:tblPr>
               <a:tblGrid>
                 <a:gridCol w="1371600"/>
-                <a:gridCol w="1463040"/>
-                <a:gridCol w="8183880"/>
+                <a:gridCol w="1645920"/>
+                <a:gridCol w="8001000"/>
               </a:tblGrid>
               <a:tr h="502920">
                 <a:tc>
@@ -31859,7 +31831,7 @@
                             <a:srgbClr val="FFFFFF"/>
                           </a:solidFill>
                         </a:rPr>
-                        <a:t>Status</a:t>
+                        <a:t>Holds?</a:t>
                       </a:r>
                     </a:p>
                   </a:txBody>
@@ -31885,7 +31857,7 @@
                             <a:srgbClr val="FFFFFF"/>
                           </a:solidFill>
                         </a:rPr>
-                        <a:t>Evidence</a:t>
+                        <a:t>Rests on</a:t>
                       </a:r>
                     </a:p>
                   </a:txBody>
@@ -31939,7 +31911,7 @@
                             <a:srgbClr val="2E7D32"/>
                           </a:solidFill>
                         </a:rPr>
-                        <a:t>established</a:t>
+                        <a:t>holds</a:t>
                       </a:r>
                     </a:p>
                   </a:txBody>
@@ -31965,7 +31937,7 @@
                             <a:srgbClr val="000000"/>
                           </a:solidFill>
                         </a:rPr>
-                        <a:t>two specifications read together; 7 clauses; no gap</a:t>
+                        <a:t>ConOps-SQ-1, Reqs-SQ-1, Specs-SQ-1: the review record; the header parts run now</a:t>
                       </a:r>
                     </a:p>
                   </a:txBody>
@@ -32019,7 +31991,7 @@
                             <a:srgbClr val="2E7D32"/>
                           </a:solidFill>
                         </a:rPr>
-                        <a:t>established</a:t>
+                        <a:t>holds</a:t>
                       </a:r>
                     </a:p>
                   </a:txBody>
@@ -32045,7 +32017,7 @@
                             <a:srgbClr val="000000"/>
                           </a:solidFill>
                         </a:rPr>
-                        <a:t>ruff exit 0; suite collects (10 tests)</a:t>
+                        <a:t>Code-RQ-1: ruff exit 0; suite collects (10 tests), run now</a:t>
                       </a:r>
                     </a:p>
                   </a:txBody>
@@ -32099,7 +32071,7 @@
                             <a:srgbClr val="2E7D32"/>
                           </a:solidFill>
                         </a:rPr>
-                        <a:t>established</a:t>
+                        <a:t>holds</a:t>
                       </a:r>
                     </a:p>
                   </a:txBody>
@@ -32125,7 +32097,7 @@
                             <a:srgbClr val="000000"/>
                           </a:solidFill>
                         </a:rPr>
-                        <a:t>10 passed; 4 of 4 test clauses; 100% branches; 3 stories walked</a:t>
+                        <a:t>Reqs-CONF-1: 10 passed; 4 of 4; 100% branches, run now · ConOps-CONF-1: 3 stories walked (record)</a:t>
                       </a:r>
                     </a:p>
                   </a:txBody>
@@ -32179,7 +32151,7 @@
                             <a:srgbClr val="2E7D32"/>
                           </a:solidFill>
                         </a:rPr>
-                        <a:t>established</a:t>
+                        <a:t>holds</a:t>
                       </a:r>
                     </a:p>
                   </a:txBody>
@@ -32205,7 +32177,7 @@
                             <a:srgbClr val="000000"/>
                           </a:solidFill>
                         </a:rPr>
-                        <a:t>sign-off by both user categories on conops.md A0</a:t>
+                        <a:t>ConOps-VAL-1: sign-off by both user categories on conops.md A0 (record)</a:t>
                       </a:r>
                     </a:p>
                   </a:txBody>
@@ -32259,7 +32231,7 @@
                             <a:srgbClr val="2E7D32"/>
                           </a:solidFill>
                         </a:rPr>
-                        <a:t>established</a:t>
+                        <a:t>holds</a:t>
                       </a:r>
                     </a:p>
                   </a:txBody>
@@ -32285,7 +32257,7 @@
                             <a:srgbClr val="000000"/>
                           </a:solidFill>
                         </a:rPr>
-                        <a:t>every marker and every derived-from resolves</a:t>
+                        <a:t>Specs-TR-1: every marker resolves, run now; every derived-from read (record)</a:t>
                       </a:r>
                     </a:p>
                   </a:txBody>
@@ -32310,7 +32282,7 @@
         </p:nvGraphicFramePr>
         <p:xfrm>
           <a:off x="777240" y="4480560"/>
-          <a:ext cx="11018520" cy="1645920"/>
+          <a:ext cx="11018519" cy="1645920"/>
         </p:xfrm>
         <a:graphic>
           <a:graphicData uri="http://schemas.openxmlformats.org/drawingml/2006/table">
@@ -32319,8 +32291,8 @@
                 <a:tableStyleId>{5C22544A-7EE6-4342-B048-85BDC9FD1C3A}</a:tableStyleId>
               </a:tblPr>
               <a:tblGrid>
-                <a:gridCol w="2194560"/>
-                <a:gridCol w="8823960"/>
+                <a:gridCol w="3291840"/>
+                <a:gridCol w="7726679"/>
               </a:tblGrid>
               <a:tr h="411480">
                 <a:tc>
@@ -32339,7 +32311,7 @@
                             <a:srgbClr val="FFFFFF"/>
                           </a:solidFill>
                         </a:rPr>
-                        <a:t>Goes stale when</a:t>
+                        <a:t>Status words</a:t>
                       </a:r>
                     </a:p>
                   </a:txBody>
@@ -32393,7 +32365,7 @@
                             <a:srgbClr val="000000"/>
                           </a:solidFill>
                         </a:rPr>
-                        <a:t>SQ, VAL</a:t>
+                        <a:t>holds (run now)</a:t>
                       </a:r>
                     </a:p>
                   </a:txBody>
@@ -32419,7 +32391,7 @@
                             <a:srgbClr val="000000"/>
                           </a:solidFill>
                         </a:rPr>
-                        <a:t>any specification changes; VAL also on a declared change of mind</a:t>
+                        <a:t>the evaluation was run against this tree while compiling the report, and passed</a:t>
                       </a:r>
                     </a:p>
                   </a:txBody>
@@ -32447,7 +32419,7 @@
                             <a:srgbClr val="000000"/>
                           </a:solidFill>
                         </a:rPr>
-                        <a:t>RQ, CONF</a:t>
+                        <a:t>holds (record)</a:t>
                       </a:r>
                     </a:p>
                   </a:txBody>
@@ -32473,7 +32445,7 @@
                             <a:srgbClr val="000000"/>
                           </a:solidFill>
                         </a:rPr>
-                        <a:t>the code or the tests change; CONF also when a specification changes</a:t>
+                        <a:t>a record exists, names this state, and records a positive decision</a:t>
                       </a:r>
                     </a:p>
                   </a:txBody>
@@ -32501,7 +32473,7 @@
                             <a:srgbClr val="000000"/>
                           </a:solidFill>
                         </a:rPr>
-                        <a:t>TR</a:t>
+                        <a:t>record names another state · does not hold · not evaluated</a:t>
                       </a:r>
                     </a:p>
                   </a:txBody>
@@ -32527,7 +32499,7 @@
                             <a:srgbClr val="000000"/>
                           </a:solidFill>
                         </a:rPr>
-                        <a:t>any artifact changes</a:t>
+                        <a:t>the decision is reported, its currency is a person's call · a run failed or a record is negative · no run, no record</a:t>
                       </a:r>
                     </a:p>
                   </a:txBody>
@@ -32693,11 +32665,11 @@
             </a:pPr>
             <a:r>
               <a:rPr sz="1800" b="1" i="0"/>
-              <a:t>Status</a:t>
+              <a:t>Holds?</a:t>
             </a:r>
             <a:r>
               <a:rPr sz="1800" b="0" i="0"/>
-              <a:t> — established or stale</a:t>
+              <a:t> — run now, by record, record names another state, does not hold, not evaluated</a:t>
             </a:r>
           </a:p>
           <a:p>
@@ -32729,7 +32701,7 @@
             </a:r>
             <a:r>
               <a:rPr sz="1800" b="0" i="0"/>
-              <a:t> — which verifier and version, which artifacts at which version, which clauses</a:t>
+              <a:t> — which verifier and version, which artifacts at which state, which clauses</a:t>
             </a:r>
           </a:p>
           <a:p>
@@ -32741,11 +32713,11 @@
             </a:pPr>
             <a:r>
               <a:rPr sz="1800" b="1" i="0"/>
-              <a:t>Stale when</a:t>
+              <a:t>What was run and read</a:t>
             </a:r>
             <a:r>
               <a:rPr sz="1800" b="0" i="0"/>
-              <a:t> — the change that would require re-establishing it</a:t>
+              <a:t> — the report's last section, so that a reader can check the compiler</a:t>
             </a:r>
           </a:p>
         </p:txBody>
@@ -32791,7 +32763,7 @@
                 </a:solidFill>
                 <a:latin typeface="Courier New"/>
               </a:rPr>
-              <a:t>analysis: pytest 9.1.1 with pytest-cov 7.1.0 and the plugin, at v0, REQ-0 to REQ-3</a:t>
+              <a:t>test: pytest 9.1.1 with pytest-cov 7.1.0 and the plugin, 2026-10-24, at the A0 snapshot, REQ-0 to REQ-3</a:t>
             </a:r>
           </a:p>
         </p:txBody>
@@ -32830,7 +32802,7 @@
                 </a:solidFill>
                 <a:latin typeface="Courier New"/>
               </a:rPr>
-              <a:t>the CONF row's provenance</a:t>
+              <a:t>the Reqs-CONF-1 row's provenance</a:t>
             </a:r>
           </a:p>
         </p:txBody>
@@ -32893,7 +32865,7 @@
                   <a:srgbClr val="000000"/>
                 </a:solidFill>
               </a:rPr>
-              <a:t>A row is a claim made by a verifier, not a fact. "pytest 9.1.1 exited 0 at v0" can be rerun; "all tests pass" in an agent's message cannot.</a:t>
+              <a:t>A row is a claim made by a verifier, not a fact. "pytest 9.1.1 exited 0 at a0" can be rerun; "all tests pass" in an agent's message cannot.</a:t>
             </a:r>
           </a:p>
         </p:txBody>
@@ -32938,7 +32910,7 @@
             </a:pPr>
             <a:r>
               <a:rPr sz="3000" b="0" i="0"/>
-              <a:t>The gate</a:t>
+              <a:t>No gate yet: one command, every mechanical evaluation</a:t>
             </a:r>
           </a:p>
         </p:txBody>
@@ -33071,7 +33043,7 @@
                   <a:srgbClr val="000000"/>
                 </a:solidFill>
               </a:rPr>
-              <a:t>work on a task</a:t>
+              <a:t>ask for the report</a:t>
             </a:r>
           </a:p>
         </p:txBody>
@@ -33165,7 +33137,7 @@
                 </a:solidFill>
                 <a:latin typeface="Courier New"/>
               </a:rPr>
-              <a:t>tools/gate.sh</a:t>
+              <a:t>tools/evaluate.sh</a:t>
             </a:r>
           </a:p>
           <a:p>
@@ -33175,12 +33147,12 @@
               </a:spcAft>
             </a:pPr>
             <a:r>
-              <a:rPr sz="1600" b="0" i="0">
+              <a:rPr sz="1500" b="0" i="0">
                 <a:solidFill>
                   <a:srgbClr val="000000"/>
                 </a:solidFill>
               </a:rPr>
-              <a:t>ruff, then pytest with coverage and the plugin</a:t>
+              <a:t>ruff, then pytest with coverage and the plugin; a header saying what was checked</a:t>
             </a:r>
           </a:p>
         </p:txBody>
@@ -33323,7 +33295,7 @@
         <p:spPr>
           <a:xfrm>
             <a:off x="9646920" y="1417320"/>
-            <a:ext cx="1371600" cy="1005840"/>
+            <a:ext cx="2103120" cy="1005840"/>
           </a:xfrm>
           <a:prstGeom prst="rect">
             <a:avLst/>
@@ -33361,12 +33333,12 @@
               </a:spcAft>
             </a:pPr>
             <a:r>
-              <a:rPr sz="1800" b="0" i="0">
+              <a:rPr sz="1600" b="0" i="0">
                 <a:solidFill>
                   <a:srgbClr val="000000"/>
                 </a:solidFill>
               </a:rPr>
-              <a:t>commit</a:t>
+              <a:t>the row holds (run now)</a:t>
             </a:r>
           </a:p>
         </p:txBody>
@@ -33493,7 +33465,7 @@
             </a:pPr>
             <a:r>
               <a:rPr sz="1600" b="0" i="0"/>
-              <a:t>the work is returned</a:t>
+              <a:t>the row does not hold</a:t>
             </a:r>
           </a:p>
         </p:txBody>
@@ -33528,11 +33500,11 @@
             </a:pPr>
             <a:r>
               <a:rPr sz="1800" b="1" i="0"/>
-              <a:t>Algorithmic gate: </a:t>
+              <a:t>It evaluates; it does not gate. </a:t>
             </a:r>
             <a:r>
               <a:rPr sz="1800" b="0" i="0"/>
-              <a:t>a program decides; the decision is an exit code (rule WF-1)</a:t>
+              <a:t>Nothing runs it unasked, nothing waits for its result; a failing run is a row that does not hold, and that is all</a:t>
             </a:r>
           </a:p>
           <a:p>
@@ -33544,11 +33516,11 @@
             </a:pPr>
             <a:r>
               <a:rPr sz="1800" b="1" i="0"/>
-              <a:t>Approval gate: </a:t>
+              <a:t>A gate (A2): </a:t>
             </a:r>
             <a:r>
               <a:rPr sz="1800" b="0" i="0"/>
-              <a:t>a recorded human decision; the first in front of a commit arrives with the build plan in A2</a:t>
+              <a:t>the same command behind a pre-commit hook, so a commit cannot complete unless it exits 0; an approval gate: a recorded human decision before a wave is accepted</a:t>
             </a:r>
           </a:p>
         </p:txBody>
@@ -33611,7 +33583,7 @@
                   <a:srgbClr val="000000"/>
                 </a:solidFill>
               </a:rPr>
-              <a:t>An agent commits often; a rule that depends on someone remembering will be skipped. A gate makes the checks a property of every commit.</a:t>
+              <a:t>What a claim is, how it is evaluated, how its state is shown, and when it must hold are four questions. A0 answers three on purpose.</a:t>
             </a:r>
           </a:p>
         </p:txBody>
@@ -33966,7 +33938,7 @@
                 </a:solidFill>
                 <a:latin typeface="Courier New"/>
               </a:rPr>
-              <a:t>tools/gate.sh, exit 1</a:t>
+              <a:t>tools/evaluate.sh, exit 1</a:t>
             </a:r>
           </a:p>
         </p:txBody>
@@ -33991,8 +33963,8 @@
               </a:tblPr>
               <a:tblGrid>
                 <a:gridCol w="1371600"/>
-                <a:gridCol w="1463040"/>
-                <a:gridCol w="1920240"/>
+                <a:gridCol w="1645920"/>
+                <a:gridCol w="1737360"/>
               </a:tblGrid>
               <a:tr h="457200">
                 <a:tc>
@@ -34037,7 +34009,7 @@
                             <a:srgbClr val="FFFFFF"/>
                           </a:solidFill>
                         </a:rPr>
-                        <a:t>Status</a:t>
+                        <a:t>Holds?</a:t>
                       </a:r>
                     </a:p>
                   </a:txBody>
@@ -34063,7 +34035,7 @@
                             <a:srgbClr val="FFFFFF"/>
                           </a:solidFill>
                         </a:rPr>
-                        <a:t>Evidence</a:t>
+                        <a:t>Rests on</a:t>
                       </a:r>
                     </a:p>
                   </a:txBody>
@@ -34117,7 +34089,7 @@
                             <a:srgbClr val="2E7D32"/>
                           </a:solidFill>
                         </a:rPr>
-                        <a:t>established</a:t>
+                        <a:t>holds</a:t>
                       </a:r>
                     </a:p>
                   </a:txBody>
@@ -34143,7 +34115,7 @@
                             <a:srgbClr val="000000"/>
                           </a:solidFill>
                         </a:rPr>
-                        <a:t>read together</a:t>
+                        <a:t>a review record</a:t>
                       </a:r>
                     </a:p>
                   </a:txBody>
@@ -34197,7 +34169,7 @@
                             <a:srgbClr val="2E7D32"/>
                           </a:solidFill>
                         </a:rPr>
-                        <a:t>established</a:t>
+                        <a:t>holds</a:t>
                       </a:r>
                     </a:p>
                   </a:txBody>
@@ -34277,7 +34249,7 @@
                             <a:srgbClr val="C00000"/>
                           </a:solidFill>
                         </a:rPr>
-                        <a:t>stale</a:t>
+                        <a:t>does not hold</a:t>
                       </a:r>
                     </a:p>
                   </a:txBody>
@@ -34357,7 +34329,7 @@
                             <a:srgbClr val="2E7D32"/>
                           </a:solidFill>
                         </a:rPr>
-                        <a:t>established</a:t>
+                        <a:t>holds</a:t>
                       </a:r>
                     </a:p>
                   </a:txBody>
@@ -34383,7 +34355,7 @@
                             <a:srgbClr val="000000"/>
                           </a:solidFill>
                         </a:rPr>
-                        <a:t>sign-off</a:t>
+                        <a:t>the sign-off</a:t>
                       </a:r>
                     </a:p>
                   </a:txBody>
@@ -34437,7 +34409,7 @@
                             <a:srgbClr val="2E7D32"/>
                           </a:solidFill>
                         </a:rPr>
-                        <a:t>established</a:t>
+                        <a:t>holds</a:t>
                       </a:r>
                     </a:p>
                   </a:txBody>
@@ -34863,7 +34835,7 @@
             </a:pPr>
             <a:r>
               <a:rPr sz="3000" b="0" i="0"/>
-              <a:t>The development rules: eight, by judgment</a:t>
+              <a:t>The judgments file: five definitions, eight clauses, by form</a:t>
             </a:r>
           </a:p>
         </p:txBody>
@@ -34974,11 +34946,11 @@
             </a:pPr>
             <a:r>
               <a:rPr sz="1800" b="1" i="0"/>
-              <a:t>SQ-1</a:t>
+              <a:t>ConOps-SQ-1</a:t>
             </a:r>
             <a:r>
               <a:rPr sz="1800" b="0" i="0"/>
-              <a:t>  well-formed and consistent</a:t>
+              <a:t>  the concept of operations is well-formed</a:t>
             </a:r>
           </a:p>
           <a:p>
@@ -34990,11 +34962,11 @@
             </a:pPr>
             <a:r>
               <a:rPr sz="1800" b="1" i="0"/>
-              <a:t>RQ-1</a:t>
+              <a:t>ConOps-CONF-1</a:t>
             </a:r>
             <a:r>
               <a:rPr sz="1800" b="0" i="0"/>
-              <a:t>  lints and collects</a:t>
+              <a:t>  every story has been walked on the realization</a:t>
             </a:r>
           </a:p>
           <a:p>
@@ -35006,11 +34978,11 @@
             </a:pPr>
             <a:r>
               <a:rPr sz="1800" b="1" i="0"/>
-              <a:t>CONF-1</a:t>
+              <a:t>ConOps-VAL-1</a:t>
             </a:r>
             <a:r>
               <a:rPr sz="1800" b="0" i="0"/>
-              <a:t>  every mechanical clause has passing evidence; the code is exercised</a:t>
+              <a:t>  the stakeholders have confirmed the concept of operations</a:t>
             </a:r>
           </a:p>
           <a:p>
@@ -35022,11 +34994,11 @@
             </a:pPr>
             <a:r>
               <a:rPr sz="1800" b="1" i="0"/>
-              <a:t>CONF-2</a:t>
+              <a:t>Reqs-SQ-1</a:t>
             </a:r>
             <a:r>
               <a:rPr sz="1800" b="0" i="0"/>
-              <a:t>  every judgment clause has a walkthrough record</a:t>
+              <a:t>  the requirements are well-formed and cover the scope</a:t>
             </a:r>
           </a:p>
         </p:txBody>
@@ -35061,11 +35033,11 @@
             </a:pPr>
             <a:r>
               <a:rPr sz="1800" b="1" i="0"/>
-              <a:t>VAL-1</a:t>
+              <a:t>Reqs-CONF-1</a:t>
             </a:r>
             <a:r>
               <a:rPr sz="1800" b="0" i="0"/>
-              <a:t>  the concept of operations carries a sign-off</a:t>
+              <a:t>  every requirement assigned test has passing evidence; the code is exercised</a:t>
             </a:r>
           </a:p>
           <a:p>
@@ -35077,7 +35049,23 @@
             </a:pPr>
             <a:r>
               <a:rPr sz="1800" b="1" i="0"/>
-              <a:t>TR-1</a:t>
+              <a:t>Specs-SQ-1</a:t>
+            </a:r>
+            <a:r>
+              <a:rPr sz="1800" b="0" i="0"/>
+              <a:t>  the specifications agree with one another</a:t>
+            </a:r>
+          </a:p>
+          <a:p>
+            <a:pPr marL="256032" indent="-256032">
+              <a:spcAft>
+                <a:spcPts val="800"/>
+              </a:spcAft>
+              <a:buChar char="•"/>
+            </a:pPr>
+            <a:r>
+              <a:rPr sz="1800" b="1" i="0"/>
+              <a:t>Specs-TR-1</a:t>
             </a:r>
             <a:r>
               <a:rPr sz="1800" b="0" i="0"/>
@@ -35093,27 +35081,11 @@
             </a:pPr>
             <a:r>
               <a:rPr sz="1800" b="1" i="0"/>
-              <a:t>WF-1</a:t>
+              <a:t>Code-RQ-1</a:t>
             </a:r>
             <a:r>
               <a:rPr sz="1800" b="0" i="0"/>
-              <a:t>  the gate stands before every commit</a:t>
-            </a:r>
-          </a:p>
-          <a:p>
-            <a:pPr marL="256032" indent="-256032">
-              <a:spcAft>
-                <a:spcPts val="800"/>
-              </a:spcAft>
-              <a:buChar char="•"/>
-            </a:pPr>
-            <a:r>
-              <a:rPr sz="1800" b="1" i="0"/>
-              <a:t>RPT-1</a:t>
-            </a:r>
-            <a:r>
-              <a:rPr sz="1800" b="0" i="0"/>
-              <a:t>  the dev log and the ledger are kept</a:t>
+              <a:t>  the realization lints and the suite collects</a:t>
             </a:r>
           </a:p>
         </p:txBody>
@@ -35176,7 +35148,7 @@
                   <a:srgbClr val="000000"/>
                 </a:solidFill>
               </a:rPr>
-              <a:t>Two styles in A0: an obligation (every X MUST have property P) and a gate (WHEN step S would complete, condition C MUST hold).</a:t>
+              <a:t>Four fields per clause: holds when, evaluated by, evidence, in this project. No when and no on-failure: nothing in A0 says when a claim must hold.</a:t>
             </a:r>
           </a:p>
         </p:txBody>
@@ -35221,7 +35193,7 @@
             </a:pPr>
             <a:r>
               <a:rPr sz="3000" b="0" i="0"/>
-              <a:t>One rule in the template form</a:t>
+              <a:t>One clause in four fields</a:t>
             </a:r>
           </a:p>
         </p:txBody>
@@ -35312,7 +35284,7 @@
         </p:nvGraphicFramePr>
         <p:xfrm>
           <a:off x="777240" y="1325880"/>
-          <a:ext cx="11018520" cy="3657600"/>
+          <a:ext cx="11018520" cy="3566160"/>
         </p:xfrm>
         <a:graphic>
           <a:graphicData uri="http://schemas.openxmlformats.org/drawingml/2006/table">
@@ -35324,7 +35296,7 @@
                 <a:gridCol w="2377440"/>
                 <a:gridCol w="8641080"/>
               </a:tblGrid>
-              <a:tr h="457200">
+              <a:tr h="713232">
                 <a:tc>
                   <a:txBody>
                     <a:bodyPr wrap="square"/>
@@ -35341,7 +35313,7 @@
                             <a:srgbClr val="FFFFFF"/>
                           </a:solidFill>
                         </a:rPr>
-                        <a:t>CONF-1</a:t>
+                        <a:t>Reqs-CONF-1</a:t>
                       </a:r>
                     </a:p>
                   </a:txBody>
@@ -35367,7 +35339,7 @@
                             <a:srgbClr val="FFFFFF"/>
                           </a:solidFill>
                         </a:rPr>
-                        <a:t>Every mechanical clause has passing evidence, and the code is exercised</a:t>
+                        <a:t>Every requirement assigned test has passing test evidence, and the realization is exercised</a:t>
                       </a:r>
                     </a:p>
                   </a:txBody>
@@ -35378,7 +35350,7 @@
                   </a:tcPr>
                 </a:tc>
               </a:tr>
-              <a:tr h="457200">
+              <a:tr h="713232">
                 <a:tc>
                   <a:txBody>
                     <a:bodyPr wrap="square"/>
@@ -35395,7 +35367,7 @@
                             <a:srgbClr val="000000"/>
                           </a:solidFill>
                         </a:rPr>
-                        <a:t>Style · Maintains</a:t>
+                        <a:t>Holds when</a:t>
                       </a:r>
                     </a:p>
                   </a:txBody>
@@ -35421,7 +35393,7 @@
                             <a:srgbClr val="000000"/>
                           </a:solidFill>
                         </a:rPr>
-                        <a:t>obligation · CONF</a:t>
+                        <a:t>Every requirement whose method is test is cited by at least one test; every citing test passes; the suite meets the project's structural-coverage objective</a:t>
                       </a:r>
                     </a:p>
                   </a:txBody>
@@ -35432,7 +35404,7 @@
                   </a:tcPr>
                 </a:tc>
               </a:tr>
-              <a:tr h="457200">
+              <a:tr h="713232">
                 <a:tc>
                   <a:txBody>
                     <a:bodyPr wrap="square"/>
@@ -35449,7 +35421,7 @@
                             <a:srgbClr val="000000"/>
                           </a:solidFill>
                         </a:rPr>
-                        <a:t>When</a:t>
+                        <a:t>Evaluated by</a:t>
                       </a:r>
                     </a:p>
                   </a:txBody>
@@ -35475,7 +35447,7 @@
                             <a:srgbClr val="000000"/>
                           </a:solidFill>
                         </a:rPr>
-                        <a:t>at every commit; every clause whose method is test</a:t>
+                        <a:t>test: the test runner, with a plugin that computes requirements coverage from the citations and the outcomes, and a coverage tool</a:t>
                       </a:r>
                     </a:p>
                   </a:txBody>
@@ -35486,115 +35458,7 @@
                   </a:tcPr>
                 </a:tc>
               </a:tr>
-              <a:tr h="457200">
-                <a:tc>
-                  <a:txBody>
-                    <a:bodyPr wrap="square"/>
-                    <a:lstStyle/>
-                    <a:p>
-                      <a:pPr>
-                        <a:spcAft>
-                          <a:spcPts val="0"/>
-                        </a:spcAft>
-                      </a:pPr>
-                      <a:r>
-                        <a:rPr sz="1600" b="0" i="0">
-                          <a:solidFill>
-                            <a:srgbClr val="000000"/>
-                          </a:solidFill>
-                        </a:rPr>
-                        <a:t>Statement</a:t>
-                      </a:r>
-                    </a:p>
-                  </a:txBody>
-                  <a:tcPr marL="73152" marR="73152" marT="36576" marB="36576">
-                    <a:solidFill>
-                      <a:srgbClr val="FFFFFF"/>
-                    </a:solidFill>
-                  </a:tcPr>
-                </a:tc>
-                <a:tc>
-                  <a:txBody>
-                    <a:bodyPr wrap="square"/>
-                    <a:lstStyle/>
-                    <a:p>
-                      <a:pPr>
-                        <a:spcAft>
-                          <a:spcPts val="0"/>
-                        </a:spcAft>
-                      </a:pPr>
-                      <a:r>
-                        <a:rPr sz="1600" b="0" i="0">
-                          <a:solidFill>
-                            <a:srgbClr val="000000"/>
-                          </a:solidFill>
-                        </a:rPr>
-                        <a:t>Every test clause MUST be cited by at least one test; every citing test MUST pass; the suite MUST reach 100 percent branch coverage</a:t>
-                      </a:r>
-                    </a:p>
-                  </a:txBody>
-                  <a:tcPr marL="73152" marR="73152" marT="36576" marB="36576">
-                    <a:solidFill>
-                      <a:srgbClr val="FFFFFF"/>
-                    </a:solidFill>
-                  </a:tcPr>
-                </a:tc>
-              </a:tr>
-              <a:tr h="457200">
-                <a:tc>
-                  <a:txBody>
-                    <a:bodyPr wrap="square"/>
-                    <a:lstStyle/>
-                    <a:p>
-                      <a:pPr>
-                        <a:spcAft>
-                          <a:spcPts val="0"/>
-                        </a:spcAft>
-                      </a:pPr>
-                      <a:r>
-                        <a:rPr sz="1600" b="0" i="0">
-                          <a:solidFill>
-                            <a:srgbClr val="000000"/>
-                          </a:solidFill>
-                        </a:rPr>
-                        <a:t>Decided by</a:t>
-                      </a:r>
-                    </a:p>
-                  </a:txBody>
-                  <a:tcPr marL="73152" marR="73152" marT="36576" marB="36576">
-                    <a:solidFill>
-                      <a:srgbClr val="F3F0F9"/>
-                    </a:solidFill>
-                  </a:tcPr>
-                </a:tc>
-                <a:tc>
-                  <a:txBody>
-                    <a:bodyPr wrap="square"/>
-                    <a:lstStyle/>
-                    <a:p>
-                      <a:pPr>
-                        <a:spcAft>
-                          <a:spcPts val="0"/>
-                        </a:spcAft>
-                      </a:pPr>
-                      <a:r>
-                        <a:rPr sz="1600" b="0" i="0">
-                          <a:solidFill>
-                            <a:srgbClr val="000000"/>
-                          </a:solidFill>
-                        </a:rPr>
-                        <a:t>analysis: uv run pytest; the plugin and pytest-cov fail the run</a:t>
-                      </a:r>
-                    </a:p>
-                  </a:txBody>
-                  <a:tcPr marL="73152" marR="73152" marT="36576" marB="36576">
-                    <a:solidFill>
-                      <a:srgbClr val="F3F0F9"/>
-                    </a:solidFill>
-                  </a:tcPr>
-                </a:tc>
-              </a:tr>
-              <a:tr h="457200">
+              <a:tr h="713232">
                 <a:tc>
                   <a:txBody>
                     <a:bodyPr wrap="square"/>
@@ -35637,7 +35501,7 @@
                             <a:srgbClr val="000000"/>
                           </a:solidFill>
                         </a:rPr>
-                        <a:t>reports/conformance.md; the coverage table</a:t>
+                        <a:t>the generated conformance report; the coverage table of the run</a:t>
                       </a:r>
                     </a:p>
                   </a:txBody>
@@ -35648,7 +35512,7 @@
                   </a:tcPr>
                 </a:tc>
               </a:tr>
-              <a:tr h="457200">
+              <a:tr h="713232">
                 <a:tc>
                   <a:txBody>
                     <a:bodyPr wrap="square"/>
@@ -35665,7 +35529,7 @@
                             <a:srgbClr val="000000"/>
                           </a:solidFill>
                         </a:rPr>
-                        <a:t>On failure</a:t>
+                        <a:t>In this project</a:t>
                       </a:r>
                     </a:p>
                   </a:txBody>
@@ -35691,67 +35555,13 @@
                             <a:srgbClr val="000000"/>
                           </a:solidFill>
                         </a:rPr>
-                        <a:t>a test or the code is fixed; a clause is never weakened to pass</a:t>
+                        <a:t>the REQ clauses of specs/requirements.md; guard/; 100 percent branch coverage; uv run pytest with tests/conftest.py and pytest-cov. Instance: REQ-1 is cited by test_critical_is_dropped</a:t>
                       </a:r>
                     </a:p>
                   </a:txBody>
                   <a:tcPr marL="73152" marR="73152" marT="36576" marB="36576">
                     <a:solidFill>
                       <a:srgbClr val="F3F0F9"/>
-                    </a:solidFill>
-                  </a:tcPr>
-                </a:tc>
-              </a:tr>
-              <a:tr h="457200">
-                <a:tc>
-                  <a:txBody>
-                    <a:bodyPr wrap="square"/>
-                    <a:lstStyle/>
-                    <a:p>
-                      <a:pPr>
-                        <a:spcAft>
-                          <a:spcPts val="0"/>
-                        </a:spcAft>
-                      </a:pPr>
-                      <a:r>
-                        <a:rPr sz="1600" b="0" i="0">
-                          <a:solidFill>
-                            <a:srgbClr val="000000"/>
-                          </a:solidFill>
-                        </a:rPr>
-                        <a:t>Example</a:t>
-                      </a:r>
-                    </a:p>
-                  </a:txBody>
-                  <a:tcPr marL="73152" marR="73152" marT="36576" marB="36576">
-                    <a:solidFill>
-                      <a:srgbClr val="FFFFFF"/>
-                    </a:solidFill>
-                  </a:tcPr>
-                </a:tc>
-                <a:tc>
-                  <a:txBody>
-                    <a:bodyPr wrap="square"/>
-                    <a:lstStyle/>
-                    <a:p>
-                      <a:pPr>
-                        <a:spcAft>
-                          <a:spcPts val="0"/>
-                        </a:spcAft>
-                      </a:pPr>
-                      <a:r>
-                        <a:rPr sz="1600" b="0" i="0">
-                          <a:solidFill>
-                            <a:srgbClr val="000000"/>
-                          </a:solidFill>
-                        </a:rPr>
-                        <a:t>REQ-1 is cited by test_critical_is_dropped</a:t>
-                      </a:r>
-                    </a:p>
-                  </a:txBody>
-                  <a:tcPr marL="73152" marR="73152" marT="36576" marB="36576">
-                    <a:solidFill>
-                      <a:srgbClr val="FFFFFF"/>
                     </a:solidFill>
                   </a:tcPr>
                 </a:tc>
@@ -35818,7 +35628,7 @@
                   <a:srgbClr val="000000"/>
                 </a:solidFill>
               </a:rPr>
-              <a:t>Decided by names the verifier, so the rule can be checked. On failure says what happens, so a red result has a next step.</a:t>
+              <a:t>The first three fields would read the same in any project with a requirements document; the fourth is what you write for yours.</a:t>
             </a:r>
           </a:p>
         </p:txBody>
@@ -35863,7 +35673,7 @@
             </a:pPr>
             <a:r>
               <a:rPr sz="3000" b="0" i="0"/>
-              <a:t>Why the rules are a file</a:t>
+              <a:t>Why the judgments are a file: the agent's three roles</a:t>
             </a:r>
           </a:p>
         </p:txBody>
@@ -35953,7 +35763,7 @@
         <p:spPr>
           <a:xfrm>
             <a:off x="777240" y="1325880"/>
-            <a:ext cx="11018520" cy="3840480"/>
+            <a:ext cx="11018520" cy="4023360"/>
           </a:xfrm>
           <a:prstGeom prst="rect">
             <a:avLst/>
@@ -35968,31 +35778,67 @@
           <a:p>
             <a:pPr marL="256032" indent="-256032">
               <a:spcAft>
-                <a:spcPts val="1000"/>
+                <a:spcPts val="800"/>
               </a:spcAft>
               <a:buChar char="•"/>
             </a:pPr>
             <a:r>
               <a:rPr sz="1800" b="0" i="0"/>
-              <a:t>An agent started in this directory is told, by CLAUDE.md, to read process/rules.md; from then on the person and the agent follow the same written process</a:t>
+              <a:t>An agent started in this directory is told, by CLAUDE.md, to read process/judgments.md; from then on the person and the agent work to the same written definitions</a:t>
             </a:r>
           </a:p>
           <a:p>
             <a:pPr marL="256032" indent="-256032">
               <a:spcAft>
-                <a:spcPts val="1000"/>
+                <a:spcPts val="800"/>
               </a:spcAft>
               <a:buChar char="•"/>
             </a:pPr>
             <a:r>
+              <a:rPr sz="1800" b="1" i="0"/>
+              <a:t>Author: </a:t>
+            </a:r>
+            <a:r>
               <a:rPr sz="1800" b="0" i="0"/>
-              <a:t>It cites a clause in each test because CONF-1 says so; it records the gate result because RPT-1 says so</a:t>
+              <a:t>its work is held to the clauses; it cites a clause in a test because Reqs-CONF-1 says what evidence looks like</a:t>
             </a:r>
           </a:p>
           <a:p>
             <a:pPr marL="256032" indent="-256032">
               <a:spcAft>
-                <a:spcPts val="1000"/>
+                <a:spcPts val="800"/>
+              </a:spcAft>
+              <a:buChar char="•"/>
+            </a:pPr>
+            <a:r>
+              <a:rPr sz="1800" b="1" i="0"/>
+              <a:t>Assessor, when asked: </a:t>
+            </a:r>
+            <a:r>
+              <a:rPr sz="1800" b="0" i="0"/>
+              <a:t>it compiles the report by running the evaluations now and reading the records, and lists what it ran and read</a:t>
+            </a:r>
+          </a:p>
+          <a:p>
+            <a:pPr marL="256032" indent="-256032">
+              <a:spcAft>
+                <a:spcPts val="800"/>
+              </a:spcAft>
+              <a:buChar char="•"/>
+            </a:pPr>
+            <a:r>
+              <a:rPr sz="1800" b="1" i="0"/>
+              <a:t>Never a decider of a human judgment: </a:t>
+            </a:r>
+            <a:r>
+              <a:rPr sz="1800" b="0" i="0"/>
+              <a:t>it does not sign, walk a story for a stakeholder, or record what a person did not do</a:t>
+            </a:r>
+          </a:p>
+          <a:p>
+            <a:pPr marL="256032" indent="-256032">
+              <a:spcAft>
+                <a:spcPts val="800"/>
               </a:spcAft>
               <a:buChar char="•"/>
             </a:pPr>
@@ -36011,7 +35857,7 @@
         </p:nvSpPr>
         <p:spPr>
           <a:xfrm>
-            <a:off x="777240" y="5394960"/>
+            <a:off x="777240" y="5577840"/>
             <a:ext cx="11018520" cy="640080"/>
           </a:xfrm>
           <a:prstGeom prst="rect">
@@ -36061,7 +35907,7 @@
                   <a:srgbClr val="000000"/>
                 </a:solidFill>
               </a:rPr>
-              <a:t>reports/dev-log.md records what each task did; the ledger records where things stand.</a:t>
+              <a:t>records/dev-log.md records what each task did; the report records where things stand.</a:t>
             </a:r>
           </a:p>
         </p:txBody>
@@ -36400,7 +36246,7 @@
             </a:pPr>
             <a:r>
               <a:rPr sz="1800" b="0" i="0"/>
-              <a:t>What the agent reads, and what the person reads back: specifications, rules, verification methods, evidence, records of state.</a:t>
+              <a:t>What the agent reads, and what the person reads back: specifications, judgments, verification methods, evidence, records and reports of state.</a:t>
             </a:r>
           </a:p>
         </p:txBody>
@@ -36527,7 +36373,7 @@
             </a:pPr>
             <a:r>
               <a:rPr sz="1800" b="0" i="0"/>
-              <a:t>Each layer summarizes the one below; rules say how each layer is checked against the next.</a:t>
+              <a:t>Each layer summarizes the one below; judgment clauses say how each layer is checked against the next.</a:t>
             </a:r>
           </a:p>
         </p:txBody>
@@ -36851,7 +36697,7 @@
                   <a:srgbClr val="000000"/>
                 </a:solidFill>
               </a:rPr>
-              <a:t>lines of specifications, rules, and reports</a:t>
+              <a:t>lines of specifications, judgments, records, and reports</a:t>
             </a:r>
           </a:p>
         </p:txBody>
@@ -36964,7 +36810,7 @@
                   <a:srgbClr val="000000"/>
                 </a:solidFill>
               </a:rPr>
-              <a:t>Ask an agent in v0/ what the system does and how it is known that the code does it. Watch where it looks: the specifications and the ledger, or the code.</a:t>
+              <a:t>Ask an agent in a0/ what the system does and how it is known that the code does it. Watch where it looks: the specifications and the report, or the code.</a:t>
             </a:r>
           </a:p>
         </p:txBody>
@@ -37316,7 +37162,7 @@
             </a:r>
             <a:r>
               <a:rPr sz="1800" b="0" i="0"/>
-              <a:t>the second stage, sanitize; architecture, the message format, contracts; a build plan with tasks and waves; analysis and review as methods; a generated ledger</a:t>
+              <a:t>the second stage, sanitize; architecture, the message format, contracts; a build plan with tasks and waves; analysis and review as methods; the first process rules, and the ledger as the report kept</a:t>
             </a:r>
           </a:p>
           <a:p>
@@ -37508,7 +37354,7 @@
             </a:r>
             <a:r>
               <a:rPr sz="1800" b="0" i="0"/>
-              <a:t>Start a ledger on day one, by hand</a:t>
+              <a:t>Start the judgments file and the report on day one</a:t>
             </a:r>
           </a:p>
           <a:p>
@@ -37556,7 +37402,7 @@
             </a:r>
             <a:r>
               <a:rPr sz="1800" b="0" i="0"/>
-              <a:t>and the gate command</a:t>
+              <a:t>and the evaluation command</a:t>
             </a:r>
           </a:p>
         </p:txBody>
@@ -37607,11 +37453,11 @@
             </a:pPr>
             <a:r>
               <a:rPr sz="1800" b="1" i="0"/>
-              <a:t>A rules file </a:t>
+              <a:t>A judgments file: </a:t>
             </a:r>
             <a:r>
               <a:rPr sz="1800" b="0" i="0"/>
-              <a:t>with the template fields; one gate first</a:t>
+              <a:t>four fields per clause; the first three copied from the form, the fourth yours</a:t>
             </a:r>
           </a:p>
           <a:p>
@@ -37889,12 +37735,12 @@
               </a:spcAft>
             </a:pPr>
             <a:r>
-              <a:rPr sz="1800" b="0" i="0">
+              <a:rPr sz="1600" b="0" i="0">
                 <a:solidFill>
                   <a:srgbClr val="000000"/>
                 </a:solidFill>
               </a:rPr>
-              <a:t>The skill the next lectures build: phrasing your own criteria with a named decider, named evidence, and a stated consequence of failure.</a:t>
+              <a:t>The skill the next lectures build: phrasing your own criteria as clauses with a named evaluation and named evidence, and, when your process needs it, a trigger and a consequence of failure.</a:t>
             </a:r>
           </a:p>
         </p:txBody>
@@ -38112,7 +37958,7 @@
                   <a:srgbClr val="000000"/>
                 </a:solidFill>
               </a:rPr>
-              <a:t>Record which ledger rows the amendment makes stale, and why</a:t>
+              <a:t>Record which clauses of the report the amendment affects, and why</a:t>
             </a:r>
           </a:p>
           <a:p>
@@ -38128,7 +37974,7 @@
                   <a:srgbClr val="000000"/>
                 </a:solidFill>
               </a:rPr>
-              <a:t>Carry it through: clause, test, gate, ledger, dev-log entry; what must the sign-off now say?</a:t>
+              <a:t>Carry it through: clause, test, evaluations, report, dev-log entry; what must the sign-off now say?</a:t>
             </a:r>
           </a:p>
         </p:txBody>
@@ -38191,7 +38037,7 @@
                   <a:srgbClr val="000000"/>
                 </a:solidFill>
               </a:rPr>
-              <a:t>Deliverable: the diff; the ledger after; half a page on which rows went stale and which verifier re-established each.</a:t>
+              <a:t>Deliverable: the diff; the report after; half a page on which rows the change affected and which evaluation re-established each.</a:t>
             </a:r>
           </a:p>
         </p:txBody>
@@ -38347,7 +38193,7 @@
             </a:pPr>
             <a:r>
               <a:rPr sz="1800" b="0" i="0"/>
-              <a:t>Run A0: uv sync; tools/gate.sh; the two sabotages, restoring the file after the first</a:t>
+              <a:t>Run A0: uv sync; tools/evaluate.sh; the two sabotages, restoring the file after the first</a:t>
             </a:r>
           </a:p>
           <a:p>
@@ -38900,7 +38746,7 @@
                   <a:srgbClr val="000000"/>
                 </a:solidFill>
               </a:rPr>
-              <a:t>Rules</a:t>
+              <a:t>Judgments</a:t>
             </a:r>
           </a:p>
           <a:p>
@@ -38915,7 +38761,7 @@
                   <a:srgbClr val="000000"/>
                 </a:solidFill>
               </a:rPr>
-              <a:t>how each layer is checked against the next; who decides; what evidence</a:t>
+              <a:t>how each layer is checked against the next; what evaluates it; what evidence</a:t>
             </a:r>
           </a:p>
         </p:txBody>
@@ -39528,7 +39374,7 @@
             </a:pPr>
             <a:r>
               <a:rPr sz="1800" b="0" i="0"/>
-              <a:t>Read a ledger row as a claim with evidence, provenance, and a stale-when condition.</a:t>
+              <a:t>Read a row of the assurance report as a claim with evidence and provenance, and say why a change can make the evidence insufficient.</a:t>
             </a:r>
           </a:p>
           <a:p>
@@ -39540,7 +39386,7 @@
             </a:pPr>
             <a:r>
               <a:rPr sz="1800" b="0" i="0"/>
-              <a:t>Explain what a gate is and why an algorithmic gate before each commit matters when an agent is the one committing.</a:t>
+              <a:t>Say what A0 leaves out, when a claim must hold, and why keeping that apart from what a claim is and how it is evaluated is deliberate.</a:t>
             </a:r>
           </a:p>
           <a:p>
@@ -39552,7 +39398,7 @@
             </a:pPr>
             <a:r>
               <a:rPr sz="1800" b="0" i="0"/>
-              <a:t>Read a development rule in the template form and identify its decider, its evidence, and what happens on failure.</a:t>
+              <a:t>Read a judgment clause in its four fields: what holds, how it is evaluated, what evidence results, how it is bound to the project.</a:t>
             </a:r>
           </a:p>
           <a:p>
